--- a/Thuyết trình.pptx
+++ b/Thuyết trình.pptx
@@ -38735,8 +38735,8 @@
           </a:p>
         </p:txBody>
       </p:sp>
-      <mc:AlternateContent xmlns:mc="http://schemas.openxmlformats.org/markup-compatibility/2006">
-        <mc:Choice xmlns:a14="http://schemas.microsoft.com/office/drawing/2010/main" Requires="a14">
+      <mc:AlternateContent xmlns:mc="http://schemas.openxmlformats.org/markup-compatibility/2006" xmlns:a14="http://schemas.microsoft.com/office/drawing/2010/main">
+        <mc:Choice Requires="a14">
           <p:sp>
             <p:nvSpPr>
               <p:cNvPr id="3" name="Google Shape;228;p38">
@@ -39950,7 +39950,7 @@
             </p:txBody>
           </p:sp>
         </mc:Choice>
-        <mc:Fallback>
+        <mc:Fallback xmlns="">
           <p:sp>
             <p:nvSpPr>
               <p:cNvPr id="3" name="Google Shape;228;p38">
@@ -44241,7 +44241,7 @@
                 <a:latin typeface="Alexandria" panose="020B0604020202020204" charset="-78"/>
                 <a:cs typeface="Alexandria" panose="020B0604020202020204" charset="-78"/>
               </a:rPr>
-              <a:t>giữ</a:t>
+              <a:t>Giữ</a:t>
             </a:r>
             <a:r>
               <a:rPr lang="vi-VN" sz="1200" kern="0" dirty="0">
@@ -44304,20 +44304,48 @@
                 <a:latin typeface="Alexandria" panose="020B0604020202020204" charset="-78"/>
                 <a:cs typeface="Alexandria" panose="020B0604020202020204" charset="-78"/>
               </a:rPr>
-              <a:t> chênh </a:t>
+              <a:t>: </a:t>
             </a:r>
             <a:r>
               <a:rPr lang="vi-VN" sz="1200" kern="0" dirty="0" err="1">
                 <a:latin typeface="Alexandria" panose="020B0604020202020204" charset="-78"/>
                 <a:cs typeface="Alexandria" panose="020B0604020202020204" charset="-78"/>
               </a:rPr>
-              <a:t>lệch</a:t>
+              <a:t>Hit-rate</a:t>
             </a:r>
             <a:r>
               <a:rPr lang="vi-VN" sz="1200" kern="0" dirty="0">
                 <a:latin typeface="Alexandria" panose="020B0604020202020204" charset="-78"/>
                 <a:cs typeface="Alexandria" panose="020B0604020202020204" charset="-78"/>
               </a:rPr>
+              <a:t> không </a:t>
+            </a:r>
+            <a:r>
+              <a:rPr lang="vi-VN" sz="1200" kern="0" dirty="0" err="1">
+                <a:latin typeface="Alexandria" panose="020B0604020202020204" charset="-78"/>
+                <a:cs typeface="Alexandria" panose="020B0604020202020204" charset="-78"/>
+              </a:rPr>
+              <a:t>đổi</a:t>
+            </a:r>
+            <a:r>
+              <a:rPr lang="vi-VN" sz="1200" kern="0" dirty="0">
+                <a:latin typeface="Alexandria" panose="020B0604020202020204" charset="-78"/>
+                <a:cs typeface="Alexandria" panose="020B0604020202020204" charset="-78"/>
+              </a:rPr>
+              <a:t> (do </a:t>
+            </a:r>
+            <a:r>
+              <a:rPr lang="vi-VN" sz="1200" kern="0" dirty="0" err="1">
+                <a:latin typeface="Alexandria" panose="020B0604020202020204" charset="-78"/>
+                <a:cs typeface="Alexandria" panose="020B0604020202020204" charset="-78"/>
+              </a:rPr>
+              <a:t>mã</a:t>
+            </a:r>
+            <a:r>
+              <a:rPr lang="vi-VN" sz="1200" kern="0" dirty="0">
+                <a:latin typeface="Alexandria" panose="020B0604020202020204" charset="-78"/>
+                <a:cs typeface="Alexandria" panose="020B0604020202020204" charset="-78"/>
+              </a:rPr>
               <a:t> </a:t>
             </a:r>
             <a:r>
@@ -44325,20 +44353,118 @@
                 <a:latin typeface="Alexandria" panose="020B0604020202020204" charset="-78"/>
                 <a:cs typeface="Alexandria" panose="020B0604020202020204" charset="-78"/>
               </a:rPr>
-              <a:t>Hit-rate</a:t>
+              <a:t>quà</a:t>
             </a:r>
             <a:r>
               <a:rPr lang="vi-VN" sz="1200" kern="0" dirty="0">
                 <a:latin typeface="Alexandria" panose="020B0604020202020204" charset="-78"/>
                 <a:cs typeface="Alexandria" panose="020B0604020202020204" charset="-78"/>
               </a:rPr>
-              <a:t> &lt;2% → </a:t>
+              <a:t> </a:t>
             </a:r>
             <a:r>
               <a:rPr lang="vi-VN" sz="1200" kern="0" dirty="0" err="1">
                 <a:latin typeface="Alexandria" panose="020B0604020202020204" charset="-78"/>
                 <a:cs typeface="Alexandria" panose="020B0604020202020204" charset="-78"/>
               </a:rPr>
+              <a:t>tặng</a:t>
+            </a:r>
+            <a:r>
+              <a:rPr lang="vi-VN" sz="1200" kern="0" dirty="0">
+                <a:latin typeface="Alexandria" panose="020B0604020202020204" charset="-78"/>
+                <a:cs typeface="Alexandria" panose="020B0604020202020204" charset="-78"/>
+              </a:rPr>
+              <a:t> </a:t>
+            </a:r>
+            <a:r>
+              <a:rPr lang="vi-VN" sz="1200" kern="0" dirty="0" err="1">
+                <a:latin typeface="Alexandria" panose="020B0604020202020204" charset="-78"/>
+                <a:cs typeface="Alexandria" panose="020B0604020202020204" charset="-78"/>
+              </a:rPr>
+              <a:t>đã</a:t>
+            </a:r>
+            <a:r>
+              <a:rPr lang="vi-VN" sz="1200" kern="0" dirty="0">
+                <a:latin typeface="Alexandria" panose="020B0604020202020204" charset="-78"/>
+                <a:cs typeface="Alexandria" panose="020B0604020202020204" charset="-78"/>
+              </a:rPr>
+              <a:t> </a:t>
+            </a:r>
+            <a:r>
+              <a:rPr lang="vi-VN" sz="1200" kern="0" dirty="0" err="1">
+                <a:latin typeface="Alexandria" panose="020B0604020202020204" charset="-78"/>
+                <a:cs typeface="Alexandria" panose="020B0604020202020204" charset="-78"/>
+              </a:rPr>
+              <a:t>quá</a:t>
+            </a:r>
+            <a:r>
+              <a:rPr lang="vi-VN" sz="1200" kern="0" dirty="0">
+                <a:latin typeface="Alexandria" panose="020B0604020202020204" charset="-78"/>
+                <a:cs typeface="Alexandria" panose="020B0604020202020204" charset="-78"/>
+              </a:rPr>
+              <a:t> </a:t>
+            </a:r>
+            <a:r>
+              <a:rPr lang="vi-VN" sz="1200" kern="0" dirty="0" err="1">
+                <a:latin typeface="Alexandria" panose="020B0604020202020204" charset="-78"/>
+                <a:cs typeface="Alexandria" panose="020B0604020202020204" charset="-78"/>
+              </a:rPr>
+              <a:t>hiếm</a:t>
+            </a:r>
+            <a:r>
+              <a:rPr lang="vi-VN" sz="1200" kern="0" dirty="0">
+                <a:latin typeface="Alexandria" panose="020B0604020202020204" charset="-78"/>
+                <a:cs typeface="Alexandria" panose="020B0604020202020204" charset="-78"/>
+              </a:rPr>
+              <a:t>, </a:t>
+            </a:r>
+            <a:r>
+              <a:rPr lang="vi-VN" sz="1200" kern="0" dirty="0" err="1">
+                <a:latin typeface="Alexandria" panose="020B0604020202020204" charset="-78"/>
+                <a:cs typeface="Alexandria" panose="020B0604020202020204" charset="-78"/>
+              </a:rPr>
+              <a:t>tự</a:t>
+            </a:r>
+            <a:r>
+              <a:rPr lang="vi-VN" sz="1200" kern="0" dirty="0">
+                <a:latin typeface="Alexandria" panose="020B0604020202020204" charset="-78"/>
+                <a:cs typeface="Alexandria" panose="020B0604020202020204" charset="-78"/>
+              </a:rPr>
+              <a:t> </a:t>
+            </a:r>
+            <a:r>
+              <a:rPr lang="vi-VN" sz="1200" kern="0" dirty="0" err="1">
+                <a:latin typeface="Alexandria" panose="020B0604020202020204" charset="-78"/>
+                <a:cs typeface="Alexandria" panose="020B0604020202020204" charset="-78"/>
+              </a:rPr>
+              <a:t>động</a:t>
+            </a:r>
+            <a:r>
+              <a:rPr lang="vi-VN" sz="1200" kern="0" dirty="0">
+                <a:latin typeface="Alexandria" panose="020B0604020202020204" charset="-78"/>
+                <a:cs typeface="Alexandria" panose="020B0604020202020204" charset="-78"/>
+              </a:rPr>
+              <a:t> </a:t>
+            </a:r>
+            <a:r>
+              <a:rPr lang="vi-VN" sz="1200" kern="0" dirty="0" err="1">
+                <a:latin typeface="Alexandria" panose="020B0604020202020204" charset="-78"/>
+                <a:cs typeface="Alexandria" panose="020B0604020202020204" charset="-78"/>
+              </a:rPr>
+              <a:t>bị</a:t>
+            </a:r>
+            <a:r>
+              <a:rPr lang="vi-VN" sz="1200" kern="0" dirty="0">
+                <a:latin typeface="Alexandria" panose="020B0604020202020204" charset="-78"/>
+                <a:cs typeface="Alexandria" panose="020B0604020202020204" charset="-78"/>
+              </a:rPr>
+              <a:t> </a:t>
+            </a:r>
+            <a:r>
+              <a:rPr lang="vi-VN" sz="1200" kern="0" dirty="0" err="1">
+                <a:latin typeface="Alexandria" panose="020B0604020202020204" charset="-78"/>
+                <a:cs typeface="Alexandria" panose="020B0604020202020204" charset="-78"/>
+              </a:rPr>
               <a:t>loại</a:t>
             </a:r>
             <a:r>
@@ -44353,6 +44479,62 @@
                 <a:latin typeface="Alexandria" panose="020B0604020202020204" charset="-78"/>
                 <a:cs typeface="Alexandria" panose="020B0604020202020204" charset="-78"/>
               </a:rPr>
+              <a:t>bởi</a:t>
+            </a:r>
+            <a:r>
+              <a:rPr lang="vi-VN" sz="1200" kern="0" dirty="0">
+                <a:latin typeface="Alexandria" panose="020B0604020202020204" charset="-78"/>
+                <a:cs typeface="Alexandria" panose="020B0604020202020204" charset="-78"/>
+              </a:rPr>
+              <a:t> </a:t>
+            </a:r>
+            <a:r>
+              <a:rPr lang="vi-VN" sz="1200" kern="0" dirty="0" err="1">
+                <a:latin typeface="Alexandria" panose="020B0604020202020204" charset="-78"/>
+                <a:cs typeface="Alexandria" panose="020B0604020202020204" charset="-78"/>
+              </a:rPr>
+              <a:t>ngưỡng</a:t>
+            </a:r>
+            <a:r>
+              <a:rPr lang="vi-VN" sz="1200" kern="0" dirty="0">
+                <a:latin typeface="Alexandria" panose="020B0604020202020204" charset="-78"/>
+                <a:cs typeface="Alexandria" panose="020B0604020202020204" charset="-78"/>
+              </a:rPr>
+              <a:t> </a:t>
+            </a:r>
+            <a:r>
+              <a:rPr lang="vi-VN" sz="1200" kern="0" dirty="0" err="1">
+                <a:latin typeface="Alexandria" panose="020B0604020202020204" charset="-78"/>
+                <a:cs typeface="Alexandria" panose="020B0604020202020204" charset="-78"/>
+              </a:rPr>
+              <a:t>min_freq</a:t>
+            </a:r>
+            <a:r>
+              <a:rPr lang="vi-VN" sz="1200" kern="0" dirty="0">
+                <a:latin typeface="Alexandria" panose="020B0604020202020204" charset="-78"/>
+                <a:cs typeface="Alexandria" panose="020B0604020202020204" charset="-78"/>
+              </a:rPr>
+              <a:t>=60) → </a:t>
+            </a:r>
+            <a:r>
+              <a:rPr lang="vi-VN" sz="1200" kern="0" dirty="0" err="1">
+                <a:latin typeface="Alexandria" panose="020B0604020202020204" charset="-78"/>
+                <a:cs typeface="Alexandria" panose="020B0604020202020204" charset="-78"/>
+              </a:rPr>
+              <a:t>loại</a:t>
+            </a:r>
+            <a:r>
+              <a:rPr lang="vi-VN" sz="1200" kern="0" dirty="0">
+                <a:latin typeface="Alexandria" panose="020B0604020202020204" charset="-78"/>
+                <a:cs typeface="Alexandria" panose="020B0604020202020204" charset="-78"/>
+              </a:rPr>
+              <a:t> </a:t>
+            </a:r>
+            <a:r>
+              <a:rPr lang="vi-VN" sz="1200" kern="0" dirty="0" err="1">
+                <a:latin typeface="Alexandria" panose="020B0604020202020204" charset="-78"/>
+                <a:cs typeface="Alexandria" panose="020B0604020202020204" charset="-78"/>
+              </a:rPr>
               <a:t>bỏ</a:t>
             </a:r>
             <a:r>
@@ -44416,28 +44598,28 @@
                 <a:latin typeface="Alexandria" panose="020B0604020202020204" charset="-78"/>
                 <a:cs typeface="Alexandria" panose="020B0604020202020204" charset="-78"/>
               </a:rPr>
-              <a:t> (không nên </a:t>
+              <a:t>, không </a:t>
             </a:r>
             <a:r>
               <a:rPr lang="vi-VN" sz="1200" kern="0" dirty="0" err="1">
                 <a:latin typeface="Alexandria" panose="020B0604020202020204" charset="-78"/>
                 <a:cs typeface="Alexandria" panose="020B0604020202020204" charset="-78"/>
               </a:rPr>
-              <a:t>gợi</a:t>
+              <a:t>phải</a:t>
             </a:r>
             <a:r>
               <a:rPr lang="vi-VN" sz="1200" kern="0" dirty="0">
                 <a:latin typeface="Alexandria" panose="020B0604020202020204" charset="-78"/>
                 <a:cs typeface="Alexandria" panose="020B0604020202020204" charset="-78"/>
               </a:rPr>
-              <a:t> ý </a:t>
+              <a:t> </a:t>
             </a:r>
             <a:r>
               <a:rPr lang="vi-VN" sz="1200" kern="0" dirty="0" err="1">
                 <a:latin typeface="Alexandria" panose="020B0604020202020204" charset="-78"/>
                 <a:cs typeface="Alexandria" panose="020B0604020202020204" charset="-78"/>
               </a:rPr>
-              <a:t>thẻ</a:t>
+              <a:t>vì</a:t>
             </a:r>
             <a:r>
               <a:rPr lang="vi-VN" sz="1200" kern="0" dirty="0">
@@ -44451,7 +44633,7 @@
                 <a:latin typeface="Alexandria" panose="020B0604020202020204" charset="-78"/>
                 <a:cs typeface="Alexandria" panose="020B0604020202020204" charset="-78"/>
               </a:rPr>
-              <a:t>quà</a:t>
+              <a:t>cải</a:t>
             </a:r>
             <a:r>
               <a:rPr lang="vi-VN" sz="1200" kern="0" dirty="0">
@@ -44465,14 +44647,42 @@
                 <a:latin typeface="Alexandria" panose="020B0604020202020204" charset="-78"/>
                 <a:cs typeface="Alexandria" panose="020B0604020202020204" charset="-78"/>
               </a:rPr>
-              <a:t>tặng</a:t>
+              <a:t>thiện</a:t>
             </a:r>
             <a:r>
               <a:rPr lang="vi-VN" sz="1200" kern="0" dirty="0">
                 <a:latin typeface="Alexandria" panose="020B0604020202020204" charset="-78"/>
                 <a:cs typeface="Alexandria" panose="020B0604020202020204" charset="-78"/>
               </a:rPr>
-              <a:t>)</a:t>
+              <a:t> </a:t>
+            </a:r>
+            <a:r>
+              <a:rPr lang="vi-VN" sz="1200" kern="0" dirty="0" err="1">
+                <a:latin typeface="Alexandria" panose="020B0604020202020204" charset="-78"/>
+                <a:cs typeface="Alexandria" panose="020B0604020202020204" charset="-78"/>
+              </a:rPr>
+              <a:t>số</a:t>
+            </a:r>
+            <a:r>
+              <a:rPr lang="vi-VN" sz="1200" kern="0" dirty="0">
+                <a:latin typeface="Alexandria" panose="020B0604020202020204" charset="-78"/>
+                <a:cs typeface="Alexandria" panose="020B0604020202020204" charset="-78"/>
+              </a:rPr>
+              <a:t> </a:t>
+            </a:r>
+            <a:r>
+              <a:rPr lang="vi-VN" sz="1200" kern="0" dirty="0" err="1">
+                <a:latin typeface="Alexandria" panose="020B0604020202020204" charset="-78"/>
+                <a:cs typeface="Alexandria" panose="020B0604020202020204" charset="-78"/>
+              </a:rPr>
+              <a:t>liệu</a:t>
+            </a:r>
+            <a:r>
+              <a:rPr lang="en-US" sz="1200" kern="0">
+                <a:latin typeface="Alexandria" panose="020B0604020202020204" charset="-78"/>
+                <a:cs typeface="Alexandria" panose="020B0604020202020204" charset="-78"/>
+              </a:rPr>
+              <a:t>.</a:t>
             </a:r>
             <a:endParaRPr lang="en-US" sz="1200" kern="0" dirty="0">
               <a:latin typeface="Alexandria" panose="020B0604020202020204" charset="-78"/>
@@ -44519,10 +44729,10 @@
       </p:pic>
       <p:pic>
         <p:nvPicPr>
-          <p:cNvPr id="9" name="Hình ảnh 8">
+          <p:cNvPr id="6" name="Hình ảnh 5">
             <a:extLst>
               <a:ext uri="{FF2B5EF4-FFF2-40B4-BE49-F238E27FC236}">
-                <a16:creationId xmlns:a16="http://schemas.microsoft.com/office/drawing/2014/main" id="{E3A90090-0E91-4AF4-B6C7-9E6EAF875D76}"/>
+                <a16:creationId xmlns:a16="http://schemas.microsoft.com/office/drawing/2014/main" id="{C92B5006-350C-49CF-B27A-C564D5C77EED}"/>
               </a:ext>
             </a:extLst>
           </p:cNvPr>
@@ -44539,8 +44749,8 @@
         </p:blipFill>
         <p:spPr>
           <a:xfrm>
-            <a:off x="4320890" y="843317"/>
-            <a:ext cx="4404896" cy="2062715"/>
+            <a:off x="5018567" y="836632"/>
+            <a:ext cx="3707219" cy="2069402"/>
           </a:xfrm>
           <a:prstGeom prst="rect">
             <a:avLst/>
